--- a/cogni-publishing/docs/design-verify-proof/boardroom/pptx/deck.pptx
+++ b/cogni-publishing/docs/design-verify-proof/boardroom/pptx/deck.pptx
@@ -939,7 +939,7 @@
         <p:spPr>
           <a:xfrm>
             <a:off x="342900" y="457200"/>
-            <a:ext cx="28575" cy="243840"/>
+            <a:ext cx="28575" cy="272415"/>
           </a:xfrm>
           <a:prstGeom prst="rect">
             <a:avLst/>
@@ -961,7 +961,7 @@
         <p:spPr>
           <a:xfrm>
             <a:off x="457200" y="457200"/>
-            <a:ext cx="11277600" cy="243840"/>
+            <a:ext cx="11277600" cy="272415"/>
           </a:xfrm>
           <a:prstGeom prst="rect">
             <a:avLst/>
@@ -979,12 +979,12 @@
           <a:p>
             <a:pPr>
               <a:lnSpc>
-                <a:spcPts val="1920"/>
-              </a:lnSpc>
-              <a:buNone/>
-            </a:pPr>
-            <a:r>
-              <a:rPr lang="en-US" sz="1200" dirty="0">
+                <a:spcPts val="2145"/>
+              </a:lnSpc>
+              <a:buNone/>
+            </a:pPr>
+            <a:r>
+              <a:rPr lang="en-US" sz="1650" dirty="0">
                 <a:solidFill>
                   <a:schemeClr val="tx1"/>
                 </a:solidFill>
@@ -994,7 +994,7 @@
               </a:rPr>
               <a:t>Today: maintenance by the calendar</a:t>
             </a:r>
-            <a:endParaRPr lang="en-US" sz="1200" dirty="0"/>
+            <a:endParaRPr lang="en-US" sz="1650" dirty="0"/>
           </a:p>
         </p:txBody>
       </p:sp>
@@ -1006,8 +1006,8 @@
         </p:nvSpPr>
         <p:spPr>
           <a:xfrm>
-            <a:off x="342900" y="815340"/>
-            <a:ext cx="28575" cy="243840"/>
+            <a:off x="342900" y="843915"/>
+            <a:ext cx="28575" cy="272415"/>
           </a:xfrm>
           <a:prstGeom prst="rect">
             <a:avLst/>
@@ -1028,8 +1028,8 @@
         </p:nvSpPr>
         <p:spPr>
           <a:xfrm>
-            <a:off x="457200" y="815340"/>
-            <a:ext cx="11277600" cy="243840"/>
+            <a:off x="457200" y="843915"/>
+            <a:ext cx="11277600" cy="272415"/>
           </a:xfrm>
           <a:prstGeom prst="rect">
             <a:avLst/>
@@ -1047,12 +1047,12 @@
           <a:p>
             <a:pPr>
               <a:lnSpc>
-                <a:spcPts val="1920"/>
-              </a:lnSpc>
-              <a:buNone/>
-            </a:pPr>
-            <a:r>
-              <a:rPr lang="en-US" sz="1200" dirty="0">
+                <a:spcPts val="2145"/>
+              </a:lnSpc>
+              <a:buNone/>
+            </a:pPr>
+            <a:r>
+              <a:rPr lang="en-US" sz="1650" dirty="0">
                 <a:solidFill>
                   <a:schemeClr val="tx1"/>
                 </a:solidFill>
@@ -1062,7 +1062,7 @@
               </a:rPr>
               <a:t>Fixed intervals, surprise failures; most stops announce themselves first and go unread.</a:t>
             </a:r>
-            <a:endParaRPr lang="en-US" sz="1200" dirty="0"/>
+            <a:endParaRPr lang="en-US" sz="1650" dirty="0"/>
           </a:p>
         </p:txBody>
       </p:sp>
@@ -1074,8 +1074,8 @@
         </p:nvSpPr>
         <p:spPr>
           <a:xfrm>
-            <a:off x="342900" y="1173480"/>
-            <a:ext cx="28575" cy="243840"/>
+            <a:off x="342900" y="1230630"/>
+            <a:ext cx="28575" cy="272415"/>
           </a:xfrm>
           <a:prstGeom prst="rect">
             <a:avLst/>
@@ -1096,8 +1096,8 @@
         </p:nvSpPr>
         <p:spPr>
           <a:xfrm>
-            <a:off x="457200" y="1173480"/>
-            <a:ext cx="11277600" cy="243840"/>
+            <a:off x="457200" y="1230630"/>
+            <a:ext cx="11277600" cy="272415"/>
           </a:xfrm>
           <a:prstGeom prst="rect">
             <a:avLst/>
@@ -1115,12 +1115,12 @@
           <a:p>
             <a:pPr>
               <a:lnSpc>
-                <a:spcPts val="1920"/>
-              </a:lnSpc>
-              <a:buNone/>
-            </a:pPr>
-            <a:r>
-              <a:rPr lang="en-US" sz="1200" dirty="0">
+                <a:spcPts val="2145"/>
+              </a:lnSpc>
+              <a:buNone/>
+            </a:pPr>
+            <a:r>
+              <a:rPr lang="en-US" sz="1650" dirty="0">
                 <a:solidFill>
                   <a:schemeClr val="tx1"/>
                 </a:solidFill>
@@ -1130,7 +1130,7 @@
               </a:rPr>
               <a:t>Tomorrow: maintenance by the condition</a:t>
             </a:r>
-            <a:endParaRPr lang="en-US" sz="1200" dirty="0"/>
+            <a:endParaRPr lang="en-US" sz="1650" dirty="0"/>
           </a:p>
         </p:txBody>
       </p:sp>
@@ -1142,8 +1142,8 @@
         </p:nvSpPr>
         <p:spPr>
           <a:xfrm>
-            <a:off x="342900" y="1531620"/>
-            <a:ext cx="28575" cy="243840"/>
+            <a:off x="342900" y="1617345"/>
+            <a:ext cx="28575" cy="272415"/>
           </a:xfrm>
           <a:prstGeom prst="rect">
             <a:avLst/>
@@ -1164,8 +1164,8 @@
         </p:nvSpPr>
         <p:spPr>
           <a:xfrm>
-            <a:off x="457200" y="1531620"/>
-            <a:ext cx="11277600" cy="243840"/>
+            <a:off x="457200" y="1617345"/>
+            <a:ext cx="11277600" cy="272415"/>
           </a:xfrm>
           <a:prstGeom prst="rect">
             <a:avLst/>
@@ -1183,12 +1183,12 @@
           <a:p>
             <a:pPr>
               <a:lnSpc>
-                <a:spcPts val="1920"/>
-              </a:lnSpc>
-              <a:buNone/>
-            </a:pPr>
-            <a:r>
-              <a:rPr lang="en-US" sz="1200" dirty="0">
+                <a:spcPts val="2145"/>
+              </a:lnSpc>
+              <a:buNone/>
+            </a:pPr>
+            <a:r>
+              <a:rPr lang="en-US" sz="1650" dirty="0">
                 <a:solidFill>
                   <a:schemeClr val="tx1"/>
                 </a:solidFill>
@@ -1198,7 +1198,7 @@
               </a:rPr>
               <a:t>One view of every asset and one ranked list of alerts, so technicians act before the stop.</a:t>
             </a:r>
-            <a:endParaRPr lang="en-US" sz="1200" dirty="0"/>
+            <a:endParaRPr lang="en-US" sz="1650" dirty="0"/>
           </a:p>
         </p:txBody>
       </p:sp>
@@ -1985,7 +1985,7 @@
         <p:spPr>
           <a:xfrm>
             <a:off x="457200" y="1028700"/>
-            <a:ext cx="8801100" cy="548640"/>
+            <a:ext cx="8801100" cy="577215"/>
           </a:xfrm>
           <a:prstGeom prst="roundRect">
             <a:avLst/>
@@ -2007,12 +2007,12 @@
           <a:p>
             <a:pPr>
               <a:lnSpc>
-                <a:spcPts val="1920"/>
-              </a:lnSpc>
-              <a:buNone/>
-            </a:pPr>
-            <a:r>
-              <a:rPr lang="en-US" sz="1200" dirty="0">
+                <a:spcPts val="2145"/>
+              </a:lnSpc>
+              <a:buNone/>
+            </a:pPr>
+            <a:r>
+              <a:rPr lang="en-US" sz="1650" dirty="0">
                 <a:solidFill>
                   <a:schemeClr val="tx1"/>
                 </a:solidFill>
@@ -2022,7 +2022,7 @@
               </a:rPr>
               <a:t>One view of asset health</a:t>
             </a:r>
-            <a:endParaRPr lang="en-US" sz="1200" dirty="0"/>
+            <a:endParaRPr lang="en-US" sz="1650" dirty="0"/>
           </a:p>
         </p:txBody>
       </p:sp>
@@ -2034,8 +2034,8 @@
         </p:nvSpPr>
         <p:spPr>
           <a:xfrm>
-            <a:off x="457200" y="1805940"/>
-            <a:ext cx="8801100" cy="548640"/>
+            <a:off x="457200" y="1834515"/>
+            <a:ext cx="8801100" cy="577215"/>
           </a:xfrm>
           <a:prstGeom prst="roundRect">
             <a:avLst/>
@@ -2057,12 +2057,12 @@
           <a:p>
             <a:pPr>
               <a:lnSpc>
-                <a:spcPts val="1920"/>
-              </a:lnSpc>
-              <a:buNone/>
-            </a:pPr>
-            <a:r>
-              <a:rPr lang="en-US" sz="1200" dirty="0">
+                <a:spcPts val="2145"/>
+              </a:lnSpc>
+              <a:buNone/>
+            </a:pPr>
+            <a:r>
+              <a:rPr lang="en-US" sz="1650" dirty="0">
                 <a:solidFill>
                   <a:schemeClr val="tx1"/>
                 </a:solidFill>
@@ -2072,7 +2072,7 @@
               </a:rPr>
               <a:t>A ranked list of alerts</a:t>
             </a:r>
-            <a:endParaRPr lang="en-US" sz="1200" dirty="0"/>
+            <a:endParaRPr lang="en-US" sz="1650" dirty="0"/>
           </a:p>
         </p:txBody>
       </p:sp>
@@ -2084,8 +2084,8 @@
         </p:nvSpPr>
         <p:spPr>
           <a:xfrm>
-            <a:off x="457200" y="2583180"/>
-            <a:ext cx="8801100" cy="548640"/>
+            <a:off x="457200" y="2640330"/>
+            <a:ext cx="8801100" cy="577215"/>
           </a:xfrm>
           <a:prstGeom prst="roundRect">
             <a:avLst/>
@@ -2107,12 +2107,12 @@
           <a:p>
             <a:pPr>
               <a:lnSpc>
-                <a:spcPts val="1920"/>
-              </a:lnSpc>
-              <a:buNone/>
-            </a:pPr>
-            <a:r>
-              <a:rPr lang="en-US" sz="1200" dirty="0">
+                <a:spcPts val="2145"/>
+              </a:lnSpc>
+              <a:buNone/>
+            </a:pPr>
+            <a:r>
+              <a:rPr lang="en-US" sz="1650" dirty="0">
                 <a:solidFill>
                   <a:schemeClr val="tx1"/>
                 </a:solidFill>
@@ -2122,7 +2122,7 @@
               </a:rPr>
               <a:t>Compliance documented by design</a:t>
             </a:r>
-            <a:endParaRPr lang="en-US" sz="1200" dirty="0"/>
+            <a:endParaRPr lang="en-US" sz="1650" dirty="0"/>
           </a:p>
         </p:txBody>
       </p:sp>
@@ -2137,8 +2137,8 @@
         </p:nvCxnSpPr>
         <p:spPr>
           <a:xfrm flipV="1">
-            <a:off x="9258300" y="1303020"/>
-            <a:ext cx="12700" cy="777240"/>
+            <a:off x="9258300" y="1317308"/>
+            <a:ext cx="12700" cy="805815"/>
           </a:xfrm>
           <a:prstGeom prst="bentConnector3">
             <a:avLst>
@@ -2161,7 +2161,7 @@
         </p:nvSpPr>
         <p:spPr>
           <a:xfrm>
-            <a:off x="10001250" y="1591628"/>
+            <a:off x="10001250" y="1620203"/>
             <a:ext cx="2114550" cy="200025"/>
           </a:xfrm>
           <a:prstGeom prst="rect">
@@ -2210,8 +2210,8 @@
         </p:nvCxnSpPr>
         <p:spPr>
           <a:xfrm flipV="1">
-            <a:off x="9258300" y="2080260"/>
-            <a:ext cx="12700" cy="777240"/>
+            <a:off x="9258300" y="2123122"/>
+            <a:ext cx="12700" cy="805815"/>
           </a:xfrm>
           <a:prstGeom prst="bentConnector3">
             <a:avLst>
@@ -2234,7 +2234,7 @@
         </p:nvSpPr>
         <p:spPr>
           <a:xfrm>
-            <a:off x="10001250" y="2368868"/>
+            <a:off x="10001250" y="2426018"/>
             <a:ext cx="2114550" cy="200025"/>
           </a:xfrm>
           <a:prstGeom prst="rect">
